--- a/Presentatie/SOLID EN GRASP BINGO.pptx
+++ b/Presentatie/SOLID EN GRASP BINGO.pptx
@@ -106,7 +106,49 @@
       </a:defRPr>
     </a:lvl9pPr>
   </p:defaultTextStyle>
+  <p:extLst>
+    <p:ext uri="{EFAFB233-063F-42B5-8137-9DF3F51BA10A}">
+      <p15:sldGuideLst xmlns:p15="http://schemas.microsoft.com/office/powerpoint/2012/main"/>
+    </p:ext>
+  </p:extLst>
 </p:presentation>
+</file>
+
+<file path=ppt/changesInfos/changesInfo1.xml><?xml version="1.0" encoding="utf-8"?>
+<pc:chgInfo xmlns:a="http://schemas.openxmlformats.org/drawingml/2006/main" xmlns:r="http://schemas.openxmlformats.org/officeDocument/2006/relationships" xmlns:ac="http://schemas.microsoft.com/office/drawing/2013/main/command" xmlns:pc="http://schemas.microsoft.com/office/powerpoint/2013/main/command">
+  <pc:docChgLst>
+    <pc:chgData name="Dekker, Nick" userId="29fdc466-9051-4683-9c0e-fe0a65625c78" providerId="ADAL" clId="{4C98DC3B-5263-4933-B096-0638C5F7710A}"/>
+    <pc:docChg chg="custSel modSld">
+      <pc:chgData name="Dekker, Nick" userId="29fdc466-9051-4683-9c0e-fe0a65625c78" providerId="ADAL" clId="{4C98DC3B-5263-4933-B096-0638C5F7710A}" dt="2025-09-22T11:47:40.126" v="3" actId="14100"/>
+      <pc:docMkLst>
+        <pc:docMk/>
+      </pc:docMkLst>
+      <pc:sldChg chg="addSp delSp modSp mod">
+        <pc:chgData name="Dekker, Nick" userId="29fdc466-9051-4683-9c0e-fe0a65625c78" providerId="ADAL" clId="{4C98DC3B-5263-4933-B096-0638C5F7710A}" dt="2025-09-22T11:47:40.126" v="3" actId="14100"/>
+        <pc:sldMkLst>
+          <pc:docMk/>
+          <pc:sldMk cId="2007070586" sldId="258"/>
+        </pc:sldMkLst>
+        <pc:picChg chg="add mod">
+          <ac:chgData name="Dekker, Nick" userId="29fdc466-9051-4683-9c0e-fe0a65625c78" providerId="ADAL" clId="{4C98DC3B-5263-4933-B096-0638C5F7710A}" dt="2025-09-22T11:47:40.126" v="3" actId="14100"/>
+          <ac:picMkLst>
+            <pc:docMk/>
+            <pc:sldMk cId="2007070586" sldId="258"/>
+            <ac:picMk id="3" creationId="{69011298-1506-39A8-4CDB-8D37E45431B0}"/>
+          </ac:picMkLst>
+        </pc:picChg>
+        <pc:picChg chg="del">
+          <ac:chgData name="Dekker, Nick" userId="29fdc466-9051-4683-9c0e-fe0a65625c78" providerId="ADAL" clId="{4C98DC3B-5263-4933-B096-0638C5F7710A}" dt="2025-09-22T11:47:35.408" v="0" actId="478"/>
+          <ac:picMkLst>
+            <pc:docMk/>
+            <pc:sldMk cId="2007070586" sldId="258"/>
+            <ac:picMk id="5" creationId="{5EC5F43C-44A1-A3DF-2B4E-6A4FCCF485C6}"/>
+          </ac:picMkLst>
+        </pc:picChg>
+      </pc:sldChg>
+    </pc:docChg>
+  </pc:docChgLst>
+</pc:chgInfo>
 </file>
 
 <file path=ppt/slideLayouts/slideLayout1.xml><?xml version="1.0" encoding="utf-8"?>
@@ -5598,10 +5640,10 @@
       </p:grpSpPr>
       <p:pic>
         <p:nvPicPr>
-          <p:cNvPr id="5" name="Afbeelding 4">
+          <p:cNvPr id="3" name="Afbeelding 2">
             <a:extLst>
               <a:ext uri="{FF2B5EF4-FFF2-40B4-BE49-F238E27FC236}">
-                <a16:creationId xmlns:a16="http://schemas.microsoft.com/office/drawing/2014/main" id="{5EC5F43C-44A1-A3DF-2B4E-6A4FCCF485C6}"/>
+                <a16:creationId xmlns:a16="http://schemas.microsoft.com/office/drawing/2014/main" id="{69011298-1506-39A8-4CDB-8D37E45431B0}"/>
               </a:ext>
             </a:extLst>
           </p:cNvPr>
@@ -5618,8 +5660,8 @@
         </p:blipFill>
         <p:spPr>
           <a:xfrm>
-            <a:off x="2755484" y="155142"/>
-            <a:ext cx="6402163" cy="6668919"/>
+            <a:off x="2544351" y="139272"/>
+            <a:ext cx="6401756" cy="6660308"/>
           </a:xfrm>
           <a:prstGeom prst="rect">
             <a:avLst/>
